--- a/reports/2026-W34.pptx
+++ b/reports/2026-W34.pptx
@@ -11,7 +11,6 @@
     <p:sldId id="259" r:id="rId10"/>
     <p:sldId id="260" r:id="rId11"/>
     <p:sldId id="261" r:id="rId12"/>
-    <p:sldId id="262" r:id="rId13"/>
   </p:sldIdLst>
   <p:sldSz cx="12191695" cy="6858000" type="screen4x3"/>
   <p:notesSz cx="6858000" cy="9144000"/>
@@ -3355,7 +3354,7 @@
                 </a:solidFill>
                 <a:latin typeface="Arial"/>
               </a:rPr>
-              <a:t>02 · SECTION</a:t>
+              <a:t>02 · SECTION　📝</a:t>
             </a:r>
           </a:p>
         </p:txBody>
@@ -3448,7 +3447,7 @@
         <p:spPr>
           <a:xfrm>
             <a:off x="868680" y="1600200"/>
-            <a:ext cx="10698480" cy="1591056"/>
+            <a:ext cx="10698480" cy="1115568"/>
           </a:xfrm>
           <a:prstGeom prst="rect">
             <a:avLst/>
@@ -3473,7 +3472,7 @@
                 </a:solidFill>
                 <a:latin typeface="Arial"/>
               </a:rPr>
-              <a:t>本週投影機市場動態相當豐富！品牌端有當貝推出主打靈動雲台與行動供電的便攜雷射新品 RX10，明基則發表高亮度雷射商用機 LH660。同時，中國經銷商通路針對愛普生、奧圖碼、松下與明基等多款家用及工程機種展開一波特價促銷。在供應鏈與前瞻技術方面，光學互連技術成為 AI 趨勢下的新焦點，中國唯捷光電大手筆投資 7.41 億美元投入磷化銦雷射晶片，Lightmatter 也提出了全光學互連藍圖。消費端討論則聚焦於便攜機型的普及化、DLP 彩虹效應（RBE）以及防塵維護等議題。</a:t>
+              <a:t>本週投影機市場在新機發布與經銷商通路促銷上相當熱絡。當貝與明基分別推出針對家用雲台與高亮商用的新機 RX10 與 LH660（IT之家）。同時，北京等在地經銷商針對愛普生、奧圖碼、明基、光峰與易仁科技等多款家用與工程機型展開密集促銷（ZOL投影機頻道）。此外，上游供應鏈也有重磅動態，唯捷光電大手筆投資雷射晶片以擴充 AI 光互連佈局（DigiTimes）。</a:t>
             </a:r>
           </a:p>
         </p:txBody>
@@ -3569,7 +3568,7 @@
                 </a:solidFill>
                 <a:latin typeface="Arial"/>
               </a:rPr>
-              <a:t>03 · SECTION</a:t>
+              <a:t>03 · SECTION　✨</a:t>
             </a:r>
           </a:p>
         </p:txBody>
@@ -3611,23 +3610,27 @@
       </p:sp>
       <p:sp>
         <p:nvSpPr>
-          <p:cNvPr id="4" name="Oval 3"/>
+          <p:cNvPr id="4" name="Rounded Rectangle 3"/>
           <p:cNvSpPr/>
           <p:nvPr/>
         </p:nvSpPr>
         <p:spPr>
           <a:xfrm>
-            <a:off x="594360" y="1728216"/>
-            <a:ext cx="100584" cy="100584"/>
-          </a:xfrm>
-          <a:prstGeom prst="ellipse">
-            <a:avLst/>
+            <a:off x="548640" y="1600200"/>
+            <a:ext cx="2602153" cy="4754880"/>
+          </a:xfrm>
+          <a:prstGeom prst="roundRect">
+            <a:avLst>
+              <a:gd name="adj" fmla="val 6000"/>
+            </a:avLst>
           </a:prstGeom>
           <a:solidFill>
-            <a:srgbClr val="4C7EFF"/>
+            <a:srgbClr val="23262F"/>
           </a:solidFill>
-          <a:ln>
-            <a:noFill/>
+          <a:ln w="12700">
+            <a:solidFill>
+              <a:srgbClr val="4C7EFF"/>
+            </a:solidFill>
           </a:ln>
           <a:effectLst/>
         </p:spPr>
@@ -3661,8 +3664,8 @@
         </p:nvSpPr>
         <p:spPr>
           <a:xfrm>
-            <a:off x="868680" y="1600200"/>
-            <a:ext cx="10698480" cy="402336"/>
+            <a:off x="749808" y="1764792"/>
+            <a:ext cx="2199817" cy="457200"/>
           </a:xfrm>
           <a:prstGeom prst="rect">
             <a:avLst/>
@@ -3670,6 +3673,41 @@
           <a:noFill/>
         </p:spPr>
         <p:txBody>
+          <a:bodyPr wrap="square" anchor="t">
+            <a:spAutoFit/>
+          </a:bodyPr>
+          <a:lstStyle/>
+          <a:p>
+            <a:pPr algn="l"/>
+            <a:r>
+              <a:rPr sz="1450" b="1">
+                <a:solidFill>
+                  <a:srgbClr val="4C7EFF"/>
+                </a:solidFill>
+                <a:latin typeface="Arial"/>
+              </a:rPr>
+              <a:t>當貝新品登場</a:t>
+            </a:r>
+          </a:p>
+        </p:txBody>
+      </p:sp>
+      <p:sp>
+        <p:nvSpPr>
+          <p:cNvPr id="6" name="TextBox 5"/>
+          <p:cNvSpPr txBox="1"/>
+          <p:nvPr/>
+        </p:nvSpPr>
+        <p:spPr>
+          <a:xfrm>
+            <a:off x="749808" y="2258568"/>
+            <a:ext cx="2199817" cy="3931920"/>
+          </a:xfrm>
+          <a:prstGeom prst="rect">
+            <a:avLst/>
+          </a:prstGeom>
+          <a:noFill/>
+        </p:spPr>
+        <p:txBody>
           <a:bodyPr wrap="square">
             <a:spAutoFit/>
           </a:bodyPr>
@@ -3677,40 +3715,44 @@
           <a:p>
             <a:pPr>
               <a:lnSpc>
-                <a:spcPct val="115000"/>
+                <a:spcPct val="120000"/>
               </a:lnSpc>
             </a:pPr>
             <a:r>
-              <a:rPr sz="1450" b="1">
-                <a:solidFill>
-                  <a:srgbClr val="FFB454"/>
+              <a:rPr sz="1150">
+                <a:solidFill>
+                  <a:srgbClr val="F5F3EC"/>
                 </a:solidFill>
                 <a:latin typeface="Arial"/>
               </a:rPr>
-              <a:t>新品發布動向</a:t>
-            </a:r>
-          </a:p>
-        </p:txBody>
-      </p:sp>
-      <p:sp>
-        <p:nvSpPr>
-          <p:cNvPr id="6" name="Oval 5"/>
+              <a:t>當貝發表 RX10 雲台投影儀，採用 0.33 吋 DMD 晶片與雷射光源，提供 1080P 解析度與 1200 CVIA 流明，售價 5,499 元人民幣（IT之家）。</a:t>
+            </a:r>
+          </a:p>
+        </p:txBody>
+      </p:sp>
+      <p:sp>
+        <p:nvSpPr>
+          <p:cNvPr id="7" name="Rounded Rectangle 6"/>
           <p:cNvSpPr/>
           <p:nvPr/>
         </p:nvSpPr>
         <p:spPr>
           <a:xfrm>
-            <a:off x="594360" y="2130552"/>
-            <a:ext cx="100584" cy="100584"/>
-          </a:xfrm>
-          <a:prstGeom prst="ellipse">
-            <a:avLst/>
+            <a:off x="3379393" y="1600200"/>
+            <a:ext cx="2602153" cy="4754880"/>
+          </a:xfrm>
+          <a:prstGeom prst="roundRect">
+            <a:avLst>
+              <a:gd name="adj" fmla="val 6000"/>
+            </a:avLst>
           </a:prstGeom>
           <a:solidFill>
-            <a:srgbClr val="4C7EFF"/>
+            <a:srgbClr val="23262F"/>
           </a:solidFill>
-          <a:ln>
-            <a:noFill/>
+          <a:ln w="12700">
+            <a:solidFill>
+              <a:srgbClr val="FFB454"/>
+            </a:solidFill>
           </a:ln>
           <a:effectLst/>
         </p:spPr>
@@ -3738,14 +3780,14 @@
       </p:sp>
       <p:sp>
         <p:nvSpPr>
-          <p:cNvPr id="7" name="TextBox 6"/>
+          <p:cNvPr id="8" name="TextBox 7"/>
           <p:cNvSpPr txBox="1"/>
           <p:nvPr/>
         </p:nvSpPr>
         <p:spPr>
           <a:xfrm>
-            <a:off x="868680" y="2002536"/>
-            <a:ext cx="10698480" cy="877824"/>
+            <a:off x="3580561" y="1764792"/>
+            <a:ext cx="2199817" cy="457200"/>
           </a:xfrm>
           <a:prstGeom prst="rect">
             <a:avLst/>
@@ -3753,6 +3795,41 @@
           <a:noFill/>
         </p:spPr>
         <p:txBody>
+          <a:bodyPr wrap="square" anchor="t">
+            <a:spAutoFit/>
+          </a:bodyPr>
+          <a:lstStyle/>
+          <a:p>
+            <a:pPr algn="l"/>
+            <a:r>
+              <a:rPr sz="1450" b="1">
+                <a:solidFill>
+                  <a:srgbClr val="FFB454"/>
+                </a:solidFill>
+                <a:latin typeface="Arial"/>
+              </a:rPr>
+              <a:t>明基發表高亮商用機</a:t>
+            </a:r>
+          </a:p>
+        </p:txBody>
+      </p:sp>
+      <p:sp>
+        <p:nvSpPr>
+          <p:cNvPr id="9" name="TextBox 8"/>
+          <p:cNvSpPr txBox="1"/>
+          <p:nvPr/>
+        </p:nvSpPr>
+        <p:spPr>
+          <a:xfrm>
+            <a:off x="3580561" y="2258568"/>
+            <a:ext cx="2199817" cy="3931920"/>
+          </a:xfrm>
+          <a:prstGeom prst="rect">
+            <a:avLst/>
+          </a:prstGeom>
+          <a:noFill/>
+        </p:spPr>
+        <p:txBody>
           <a:bodyPr wrap="square">
             <a:spAutoFit/>
           </a:bodyPr>
@@ -3760,49 +3837,44 @@
           <a:p>
             <a:pPr>
               <a:lnSpc>
-                <a:spcPct val="115000"/>
+                <a:spcPct val="120000"/>
               </a:lnSpc>
             </a:pPr>
             <a:r>
-              <a:rPr sz="1450" b="1">
-                <a:solidFill>
-                  <a:srgbClr val="FFB454"/>
+              <a:rPr sz="1150">
+                <a:solidFill>
+                  <a:srgbClr val="F5F3EC"/>
                 </a:solidFill>
                 <a:latin typeface="Arial"/>
               </a:rPr>
-              <a:t>當貝</a:t>
-            </a:r>
-            <a:r>
-              <a:rPr sz="1450">
-                <a:solidFill>
-                  <a:srgbClr val="F5F3EC"/>
-                </a:solidFill>
-                <a:latin typeface="Arial"/>
-              </a:rPr>
-              <a:t> 於京東推出 RX10 雲台雷射投影儀，售價 5,499 元人民幣。搭載 0.33 吋 DMD 晶片、1080P 解析度與 1200 CVIA 流明，具備 225° 俯仰調節雲台、MT9669 晶片，並支援行動電源供電與 HDMI 2.1 介面 (IT之家)。</a:t>
-            </a:r>
-          </a:p>
-        </p:txBody>
-      </p:sp>
-      <p:sp>
-        <p:nvSpPr>
-          <p:cNvPr id="8" name="Oval 7"/>
+              <a:t>明基推出 LH660 雷射商用投影機，主打 4600 流明高亮度、0.65 吋 DMD 晶片與 IP6X 防塵等級，首發價 9,499 元人民幣（IT之家）；經銷商同步針對 E545、E585 與 EH6834 等商用機種展開價格促銷（ZOL投影機頻道）。</a:t>
+            </a:r>
+          </a:p>
+        </p:txBody>
+      </p:sp>
+      <p:sp>
+        <p:nvSpPr>
+          <p:cNvPr id="10" name="Rounded Rectangle 9"/>
           <p:cNvSpPr/>
           <p:nvPr/>
         </p:nvSpPr>
         <p:spPr>
           <a:xfrm>
-            <a:off x="594360" y="3008376"/>
-            <a:ext cx="100584" cy="100584"/>
-          </a:xfrm>
-          <a:prstGeom prst="ellipse">
-            <a:avLst/>
+            <a:off x="6210147" y="1600200"/>
+            <a:ext cx="2602153" cy="4754880"/>
+          </a:xfrm>
+          <a:prstGeom prst="roundRect">
+            <a:avLst>
+              <a:gd name="adj" fmla="val 6000"/>
+            </a:avLst>
           </a:prstGeom>
           <a:solidFill>
-            <a:srgbClr val="4C7EFF"/>
+            <a:srgbClr val="23262F"/>
           </a:solidFill>
-          <a:ln>
-            <a:noFill/>
+          <a:ln w="12700">
+            <a:solidFill>
+              <a:srgbClr val="8B7FD6"/>
+            </a:solidFill>
           </a:ln>
           <a:effectLst/>
         </p:spPr>
@@ -3830,14 +3902,14 @@
       </p:sp>
       <p:sp>
         <p:nvSpPr>
-          <p:cNvPr id="9" name="TextBox 8"/>
+          <p:cNvPr id="11" name="TextBox 10"/>
           <p:cNvSpPr txBox="1"/>
           <p:nvPr/>
         </p:nvSpPr>
         <p:spPr>
           <a:xfrm>
-            <a:off x="868680" y="2880360"/>
-            <a:ext cx="10698480" cy="877824"/>
+            <a:off x="6411315" y="1764792"/>
+            <a:ext cx="2199817" cy="457200"/>
           </a:xfrm>
           <a:prstGeom prst="rect">
             <a:avLst/>
@@ -3845,6 +3917,41 @@
           <a:noFill/>
         </p:spPr>
         <p:txBody>
+          <a:bodyPr wrap="square" anchor="t">
+            <a:spAutoFit/>
+          </a:bodyPr>
+          <a:lstStyle/>
+          <a:p>
+            <a:pPr algn="l"/>
+            <a:r>
+              <a:rPr sz="1450" b="1">
+                <a:solidFill>
+                  <a:srgbClr val="8B7FD6"/>
+                </a:solidFill>
+                <a:latin typeface="Arial"/>
+              </a:rPr>
+              <a:t>品牌通路優惠齊發</a:t>
+            </a:r>
+          </a:p>
+        </p:txBody>
+      </p:sp>
+      <p:sp>
+        <p:nvSpPr>
+          <p:cNvPr id="12" name="TextBox 11"/>
+          <p:cNvSpPr txBox="1"/>
+          <p:nvPr/>
+        </p:nvSpPr>
+        <p:spPr>
+          <a:xfrm>
+            <a:off x="6411315" y="2258568"/>
+            <a:ext cx="2199817" cy="3931920"/>
+          </a:xfrm>
+          <a:prstGeom prst="rect">
+            <a:avLst/>
+          </a:prstGeom>
+          <a:noFill/>
+        </p:spPr>
+        <p:txBody>
           <a:bodyPr wrap="square">
             <a:spAutoFit/>
           </a:bodyPr>
@@ -3852,49 +3959,44 @@
           <a:p>
             <a:pPr>
               <a:lnSpc>
-                <a:spcPct val="115000"/>
+                <a:spcPct val="120000"/>
               </a:lnSpc>
             </a:pPr>
             <a:r>
-              <a:rPr sz="1450" b="1">
-                <a:solidFill>
-                  <a:srgbClr val="FFB454"/>
+              <a:rPr sz="1150">
+                <a:solidFill>
+                  <a:srgbClr val="F5F3EC"/>
                 </a:solidFill>
                 <a:latin typeface="Arial"/>
               </a:rPr>
-              <a:t>明基（BenQ）</a:t>
-            </a:r>
-            <a:r>
-              <a:rPr sz="1450">
-                <a:solidFill>
-                  <a:srgbClr val="F5F3EC"/>
-                </a:solidFill>
-                <a:latin typeface="Arial"/>
-              </a:rPr>
-              <a:t> 發表全新雷射商用投影機 LH660，首售價 9,499 元人民幣。專為大型會議室設計，提供 4600 流明高亮度、1080P 解析度與 0.65 吋 DMD 晶片，並配備 IP6X 防塵光機與 1.3 倍變焦鏡頭 (IT之家)。</a:t>
-            </a:r>
-          </a:p>
-        </p:txBody>
-      </p:sp>
-      <p:sp>
-        <p:nvSpPr>
-          <p:cNvPr id="10" name="Oval 9"/>
+              <a:t>奧圖碼 UHZ616 4K 雷射家用機特價 9,699 元人民幣（ZOL投影機頻道）；愛普生 CH-TW7000（8,499 元人民幣）、CH-TW7400（15,000 元人民幣）及商用 CB-2265U（10,500 元人民幣）於北京經銷商祭出優惠（ZOL投影機頻道）；光峰 AL-DK750S 4K 雷射工程機與易仁科技 YR-PPV60AW 超短焦等機型亦推出節慶與暑期促銷（ZOL投影機頻道）。</a:t>
+            </a:r>
+          </a:p>
+        </p:txBody>
+      </p:sp>
+      <p:sp>
+        <p:nvSpPr>
+          <p:cNvPr id="13" name="Rounded Rectangle 12"/>
           <p:cNvSpPr/>
           <p:nvPr/>
         </p:nvSpPr>
         <p:spPr>
           <a:xfrm>
-            <a:off x="594360" y="3886199"/>
-            <a:ext cx="100584" cy="100584"/>
-          </a:xfrm>
-          <a:prstGeom prst="ellipse">
-            <a:avLst/>
+            <a:off x="9040901" y="1600200"/>
+            <a:ext cx="2602153" cy="4754880"/>
+          </a:xfrm>
+          <a:prstGeom prst="roundRect">
+            <a:avLst>
+              <a:gd name="adj" fmla="val 6000"/>
+            </a:avLst>
           </a:prstGeom>
           <a:solidFill>
-            <a:srgbClr val="4C7EFF"/>
+            <a:srgbClr val="23262F"/>
           </a:solidFill>
-          <a:ln>
-            <a:noFill/>
+          <a:ln w="12700">
+            <a:solidFill>
+              <a:srgbClr val="6FCF97"/>
+            </a:solidFill>
           </a:ln>
           <a:effectLst/>
         </p:spPr>
@@ -3922,14 +4024,14 @@
       </p:sp>
       <p:sp>
         <p:nvSpPr>
-          <p:cNvPr id="11" name="TextBox 10"/>
+          <p:cNvPr id="14" name="TextBox 13"/>
           <p:cNvSpPr txBox="1"/>
           <p:nvPr/>
         </p:nvSpPr>
         <p:spPr>
           <a:xfrm>
-            <a:off x="868680" y="3758183"/>
-            <a:ext cx="10698480" cy="877824"/>
+            <a:off x="9242069" y="1764792"/>
+            <a:ext cx="2199817" cy="457200"/>
           </a:xfrm>
           <a:prstGeom prst="rect">
             <a:avLst/>
@@ -3937,91 +4039,34 @@
           <a:noFill/>
         </p:spPr>
         <p:txBody>
-          <a:bodyPr wrap="square">
+          <a:bodyPr wrap="square" anchor="t">
             <a:spAutoFit/>
           </a:bodyPr>
           <a:lstStyle/>
           <a:p>
-            <a:pPr>
-              <a:lnSpc>
-                <a:spcPct val="115000"/>
-              </a:lnSpc>
-            </a:pPr>
+            <a:pPr algn="l"/>
             <a:r>
               <a:rPr sz="1450" b="1">
                 <a:solidFill>
-                  <a:srgbClr val="FFB454"/>
+                  <a:srgbClr val="6FCF97"/>
                 </a:solidFill>
                 <a:latin typeface="Arial"/>
               </a:rPr>
-              <a:t>海信（Hisense）</a:t>
-            </a:r>
-            <a:r>
-              <a:rPr sz="1450">
-                <a:solidFill>
-                  <a:srgbClr val="F5F3EC"/>
-                </a:solidFill>
-                <a:latin typeface="Arial"/>
-              </a:rPr>
-              <a:t> 即將推出最新一代 PX4 Pro 雷射電視，挪威市場消費者正評估其與促銷中的前代 PX3 Pro 之間的價格與規格升級幅度 (Reddit r/projectors)。</a:t>
-            </a:r>
-          </a:p>
-        </p:txBody>
-      </p:sp>
-      <p:sp>
-        <p:nvSpPr>
-          <p:cNvPr id="12" name="Oval 11"/>
-          <p:cNvSpPr/>
-          <p:nvPr/>
-        </p:nvSpPr>
-        <p:spPr>
-          <a:xfrm>
-            <a:off x="594360" y="4764023"/>
-            <a:ext cx="100584" cy="100584"/>
-          </a:xfrm>
-          <a:prstGeom prst="ellipse">
-            <a:avLst/>
-          </a:prstGeom>
-          <a:solidFill>
-            <a:srgbClr val="4C7EFF"/>
-          </a:solidFill>
-          <a:ln>
-            <a:noFill/>
-          </a:ln>
-          <a:effectLst/>
-        </p:spPr>
-        <p:style>
-          <a:lnRef idx="1">
-            <a:schemeClr val="accent1"/>
-          </a:lnRef>
-          <a:fillRef idx="3">
-            <a:schemeClr val="accent1"/>
-          </a:fillRef>
-          <a:effectRef idx="2">
-            <a:schemeClr val="accent1"/>
-          </a:effectRef>
-          <a:fontRef idx="minor">
-            <a:schemeClr val="lt1"/>
-          </a:fontRef>
-        </p:style>
-        <p:txBody>
-          <a:bodyPr rtlCol="0" anchor="ctr"/>
-          <a:lstStyle/>
-          <a:p>
-            <a:pPr algn="ctr"/>
-          </a:p>
-        </p:txBody>
-      </p:sp>
-      <p:sp>
-        <p:nvSpPr>
-          <p:cNvPr id="13" name="TextBox 12"/>
+              <a:t>海信旗艦與買賣爭議</a:t>
+            </a:r>
+          </a:p>
+        </p:txBody>
+      </p:sp>
+      <p:sp>
+        <p:nvSpPr>
+          <p:cNvPr id="15" name="TextBox 14"/>
           <p:cNvSpPr txBox="1"/>
           <p:nvPr/>
         </p:nvSpPr>
         <p:spPr>
           <a:xfrm>
-            <a:off x="868680" y="4636007"/>
-            <a:ext cx="10698480" cy="402336"/>
+            <a:off x="9242069" y="2258568"/>
+            <a:ext cx="2199817" cy="3931920"/>
           </a:xfrm>
           <a:prstGeom prst="rect">
             <a:avLst/>
@@ -4036,24 +4081,24 @@
           <a:p>
             <a:pPr>
               <a:lnSpc>
-                <a:spcPct val="115000"/>
+                <a:spcPct val="120000"/>
               </a:lnSpc>
             </a:pPr>
             <a:r>
-              <a:rPr sz="1450" b="1">
-                <a:solidFill>
-                  <a:srgbClr val="FFB454"/>
+              <a:rPr sz="1150">
+                <a:solidFill>
+                  <a:srgbClr val="F5F3EC"/>
                 </a:solidFill>
                 <a:latin typeface="Arial"/>
               </a:rPr>
-              <a:t>通路與促銷動脈</a:t>
-            </a:r>
-          </a:p>
-        </p:txBody>
-      </p:sp>
-      <p:sp>
-        <p:nvSpPr>
-          <p:cNvPr id="14" name="TextBox 13"/>
+              <a:t>海外社群熱烈討論海信 PX3 Pro 與即將上市、價格預計高出兩倍的 PX4 Pro 雷射電視選購抉擇；同時也有消費者反映在電商平台買到海信 PT1 退貨整新機之疑慮（Reddit r/projectors）。</a:t>
+            </a:r>
+          </a:p>
+        </p:txBody>
+      </p:sp>
+      <p:sp>
+        <p:nvSpPr>
+          <p:cNvPr id="16" name="TextBox 15"/>
           <p:cNvSpPr txBox="1"/>
           <p:nvPr/>
         </p:nvSpPr>
@@ -4142,7 +4187,7 @@
                 </a:solidFill>
                 <a:latin typeface="Arial"/>
               </a:rPr>
-              <a:t>04 · SECTION</a:t>
+              <a:t>04 · SECTION　🔧</a:t>
             </a:r>
           </a:p>
         </p:txBody>
@@ -4177,30 +4222,34 @@
                 </a:solidFill>
                 <a:latin typeface="Arial"/>
               </a:rPr>
-              <a:t>市場與品牌動態</a:t>
-            </a:r>
-          </a:p>
-        </p:txBody>
-      </p:sp>
-      <p:sp>
-        <p:nvSpPr>
-          <p:cNvPr id="4" name="Oval 3"/>
+              <a:t>技術與供應鏈</a:t>
+            </a:r>
+          </a:p>
+        </p:txBody>
+      </p:sp>
+      <p:sp>
+        <p:nvSpPr>
+          <p:cNvPr id="4" name="Rounded Rectangle 3"/>
           <p:cNvSpPr/>
           <p:nvPr/>
         </p:nvSpPr>
         <p:spPr>
           <a:xfrm>
-            <a:off x="594360" y="1728216"/>
-            <a:ext cx="100584" cy="100584"/>
-          </a:xfrm>
-          <a:prstGeom prst="ellipse">
-            <a:avLst/>
+            <a:off x="548640" y="1600200"/>
+            <a:ext cx="3545738" cy="4754880"/>
+          </a:xfrm>
+          <a:prstGeom prst="roundRect">
+            <a:avLst>
+              <a:gd name="adj" fmla="val 6000"/>
+            </a:avLst>
           </a:prstGeom>
           <a:solidFill>
-            <a:srgbClr val="4C7EFF"/>
+            <a:srgbClr val="23262F"/>
           </a:solidFill>
-          <a:ln>
-            <a:noFill/>
+          <a:ln w="12700">
+            <a:solidFill>
+              <a:srgbClr val="4C7EFF"/>
+            </a:solidFill>
           </a:ln>
           <a:effectLst/>
         </p:spPr>
@@ -4234,8 +4283,8 @@
         </p:nvSpPr>
         <p:spPr>
           <a:xfrm>
-            <a:off x="868680" y="1600200"/>
-            <a:ext cx="10698480" cy="1353312"/>
+            <a:off x="749808" y="1764792"/>
+            <a:ext cx="3143402" cy="457200"/>
           </a:xfrm>
           <a:prstGeom prst="rect">
             <a:avLst/>
@@ -4243,6 +4292,41 @@
           <a:noFill/>
         </p:spPr>
         <p:txBody>
+          <a:bodyPr wrap="square" anchor="t">
+            <a:spAutoFit/>
+          </a:bodyPr>
+          <a:lstStyle/>
+          <a:p>
+            <a:pPr algn="l"/>
+            <a:r>
+              <a:rPr sz="1450" b="1">
+                <a:solidFill>
+                  <a:srgbClr val="4C7EFF"/>
+                </a:solidFill>
+                <a:latin typeface="Arial"/>
+              </a:rPr>
+              <a:t>唯捷光電巨額投資雷射晶片</a:t>
+            </a:r>
+          </a:p>
+        </p:txBody>
+      </p:sp>
+      <p:sp>
+        <p:nvSpPr>
+          <p:cNvPr id="6" name="TextBox 5"/>
+          <p:cNvSpPr txBox="1"/>
+          <p:nvPr/>
+        </p:nvSpPr>
+        <p:spPr>
+          <a:xfrm>
+            <a:off x="749808" y="2258568"/>
+            <a:ext cx="3143402" cy="3931920"/>
+          </a:xfrm>
+          <a:prstGeom prst="rect">
+            <a:avLst/>
+          </a:prstGeom>
+          <a:noFill/>
+        </p:spPr>
+        <p:txBody>
           <a:bodyPr wrap="square">
             <a:spAutoFit/>
           </a:bodyPr>
@@ -4250,49 +4334,44 @@
           <a:p>
             <a:pPr>
               <a:lnSpc>
-                <a:spcPct val="115000"/>
+                <a:spcPct val="120000"/>
               </a:lnSpc>
             </a:pPr>
             <a:r>
-              <a:rPr sz="1450" b="1">
-                <a:solidFill>
-                  <a:srgbClr val="FFB454"/>
+              <a:rPr sz="1150">
+                <a:solidFill>
+                  <a:srgbClr val="F5F3EC"/>
                 </a:solidFill>
                 <a:latin typeface="Arial"/>
               </a:rPr>
-              <a:t>家用與展演機種促銷</a:t>
-            </a:r>
-            <a:r>
-              <a:rPr sz="1450">
-                <a:solidFill>
-                  <a:srgbClr val="F5F3EC"/>
-                </a:solidFill>
-                <a:latin typeface="Arial"/>
-              </a:rPr>
-              <a:t>：奧圖碼 UHZ616 4K 雷射家用投影機推出 9,699 元人民幣特價；愛普生家庭劇院機型 CH-TW7000 與 CH-TW7400 在北京經銷商分別打出 8,499 元與 15,000 元人民幣促銷價；光峰 AL-DK750S 4K 雷射工程機配合七夕開展推廣；易仁科技亦針對 YR-PPV60AW（4K 雷射超短焦）及 YR-CL7816（3LCD 雷射高亮）展開暑期特惠 (ZOL投影機頻道)。</a:t>
-            </a:r>
-          </a:p>
-        </p:txBody>
-      </p:sp>
-      <p:sp>
-        <p:nvSpPr>
-          <p:cNvPr id="6" name="Oval 5"/>
+              <a:t>中國唯捷光電投資約 7.41 億美元於常州建立製造基地，將業務由 VCSEL 擴展至高階磷化銦（InP）雷射晶片，全力搶攻 AI 光互連市場（DigiTimes）。</a:t>
+            </a:r>
+          </a:p>
+        </p:txBody>
+      </p:sp>
+      <p:sp>
+        <p:nvSpPr>
+          <p:cNvPr id="7" name="Rounded Rectangle 6"/>
           <p:cNvSpPr/>
           <p:nvPr/>
         </p:nvSpPr>
         <p:spPr>
           <a:xfrm>
-            <a:off x="594360" y="3081528"/>
-            <a:ext cx="100584" cy="100584"/>
-          </a:xfrm>
-          <a:prstGeom prst="ellipse">
-            <a:avLst/>
+            <a:off x="4322978" y="1600200"/>
+            <a:ext cx="3545738" cy="4754880"/>
+          </a:xfrm>
+          <a:prstGeom prst="roundRect">
+            <a:avLst>
+              <a:gd name="adj" fmla="val 6000"/>
+            </a:avLst>
           </a:prstGeom>
           <a:solidFill>
-            <a:srgbClr val="4C7EFF"/>
+            <a:srgbClr val="23262F"/>
           </a:solidFill>
-          <a:ln>
-            <a:noFill/>
+          <a:ln w="12700">
+            <a:solidFill>
+              <a:srgbClr val="FFB454"/>
+            </a:solidFill>
           </a:ln>
           <a:effectLst/>
         </p:spPr>
@@ -4320,14 +4399,14 @@
       </p:sp>
       <p:sp>
         <p:nvSpPr>
-          <p:cNvPr id="7" name="TextBox 6"/>
+          <p:cNvPr id="8" name="TextBox 7"/>
           <p:cNvSpPr txBox="1"/>
           <p:nvPr/>
         </p:nvSpPr>
         <p:spPr>
           <a:xfrm>
-            <a:off x="868680" y="2953512"/>
-            <a:ext cx="10698480" cy="1591056"/>
+            <a:off x="4524146" y="1764792"/>
+            <a:ext cx="3143402" cy="457200"/>
           </a:xfrm>
           <a:prstGeom prst="rect">
             <a:avLst/>
@@ -4335,6 +4414,41 @@
           <a:noFill/>
         </p:spPr>
         <p:txBody>
+          <a:bodyPr wrap="square" anchor="t">
+            <a:spAutoFit/>
+          </a:bodyPr>
+          <a:lstStyle/>
+          <a:p>
+            <a:pPr algn="l"/>
+            <a:r>
+              <a:rPr sz="1450" b="1">
+                <a:solidFill>
+                  <a:srgbClr val="FFB454"/>
+                </a:solidFill>
+                <a:latin typeface="Arial"/>
+              </a:rPr>
+              <a:t>全光學架構突破傳輸瓶頸</a:t>
+            </a:r>
+          </a:p>
+        </p:txBody>
+      </p:sp>
+      <p:sp>
+        <p:nvSpPr>
+          <p:cNvPr id="9" name="TextBox 8"/>
+          <p:cNvSpPr txBox="1"/>
+          <p:nvPr/>
+        </p:nvSpPr>
+        <p:spPr>
+          <a:xfrm>
+            <a:off x="4524146" y="2258568"/>
+            <a:ext cx="3143402" cy="3931920"/>
+          </a:xfrm>
+          <a:prstGeom prst="rect">
+            <a:avLst/>
+          </a:prstGeom>
+          <a:noFill/>
+        </p:spPr>
+        <p:txBody>
           <a:bodyPr wrap="square">
             <a:spAutoFit/>
           </a:bodyPr>
@@ -4342,33 +4456,146 @@
           <a:p>
             <a:pPr>
               <a:lnSpc>
-                <a:spcPct val="115000"/>
+                <a:spcPct val="120000"/>
               </a:lnSpc>
             </a:pPr>
             <a:r>
-              <a:rPr sz="1450" b="1">
-                <a:solidFill>
-                  <a:srgbClr val="FFB454"/>
+              <a:rPr sz="1150">
+                <a:solidFill>
+                  <a:srgbClr val="F5F3EC"/>
                 </a:solidFill>
                 <a:latin typeface="Arial"/>
               </a:rPr>
-              <a:t>商務與工程機種特價</a:t>
-            </a:r>
-            <a:r>
-              <a:rPr sz="1450">
-                <a:solidFill>
-                  <a:srgbClr val="F5F3EC"/>
+              <a:t>面對 AI 資料中心 SerDes 速度逼近 448G 的銅纜極限，Lightmatter 提出全光學互連架構藍圖，推動光學技術發展（DigiTimes）。</a:t>
+            </a:r>
+          </a:p>
+        </p:txBody>
+      </p:sp>
+      <p:sp>
+        <p:nvSpPr>
+          <p:cNvPr id="10" name="Rounded Rectangle 9"/>
+          <p:cNvSpPr/>
+          <p:nvPr/>
+        </p:nvSpPr>
+        <p:spPr>
+          <a:xfrm>
+            <a:off x="8097316" y="1600200"/>
+            <a:ext cx="3545738" cy="4754880"/>
+          </a:xfrm>
+          <a:prstGeom prst="roundRect">
+            <a:avLst>
+              <a:gd name="adj" fmla="val 6000"/>
+            </a:avLst>
+          </a:prstGeom>
+          <a:solidFill>
+            <a:srgbClr val="23262F"/>
+          </a:solidFill>
+          <a:ln w="12700">
+            <a:solidFill>
+              <a:srgbClr val="8B7FD6"/>
+            </a:solidFill>
+          </a:ln>
+          <a:effectLst/>
+        </p:spPr>
+        <p:style>
+          <a:lnRef idx="1">
+            <a:schemeClr val="accent1"/>
+          </a:lnRef>
+          <a:fillRef idx="3">
+            <a:schemeClr val="accent1"/>
+          </a:fillRef>
+          <a:effectRef idx="2">
+            <a:schemeClr val="accent1"/>
+          </a:effectRef>
+          <a:fontRef idx="minor">
+            <a:schemeClr val="lt1"/>
+          </a:fontRef>
+        </p:style>
+        <p:txBody>
+          <a:bodyPr rtlCol="0" anchor="ctr"/>
+          <a:lstStyle/>
+          <a:p>
+            <a:pPr algn="ctr"/>
+          </a:p>
+        </p:txBody>
+      </p:sp>
+      <p:sp>
+        <p:nvSpPr>
+          <p:cNvPr id="11" name="TextBox 10"/>
+          <p:cNvSpPr txBox="1"/>
+          <p:nvPr/>
+        </p:nvSpPr>
+        <p:spPr>
+          <a:xfrm>
+            <a:off x="8298484" y="1764792"/>
+            <a:ext cx="3143402" cy="457200"/>
+          </a:xfrm>
+          <a:prstGeom prst="rect">
+            <a:avLst/>
+          </a:prstGeom>
+          <a:noFill/>
+        </p:spPr>
+        <p:txBody>
+          <a:bodyPr wrap="square" anchor="t">
+            <a:spAutoFit/>
+          </a:bodyPr>
+          <a:lstStyle/>
+          <a:p>
+            <a:pPr algn="l"/>
+            <a:r>
+              <a:rPr sz="1450" b="1">
+                <a:solidFill>
+                  <a:srgbClr val="8B7FD6"/>
                 </a:solidFill>
                 <a:latin typeface="Arial"/>
               </a:rPr>
-              <a:t>：北京經銷商通路針對松下 PT-BMZ51SC（售價 39,760 元人民幣）與短焦機 PT-X3282STC、明基 E545（4,199 元人民幣）與 E585（6,099 元人民幣）、愛普生 CB-2265U（10,500 元人民幣）、索諾克 SNP-AC55LU（8,000 元人民幣）與 SNP-AC40LU（12,530 元人民幣）、宏碁 AX620（3,000 元人民幣）進行促銷；日立 TCP-D1070U 雙燈工程機則進行清庫存特價 (ZOL投影機頻道)。</a:t>
-            </a:r>
-          </a:p>
-        </p:txBody>
-      </p:sp>
-      <p:sp>
-        <p:nvSpPr>
-          <p:cNvPr id="8" name="TextBox 7"/>
+              <a:t>消費端防塵與品質痛點</a:t>
+            </a:r>
+          </a:p>
+        </p:txBody>
+      </p:sp>
+      <p:sp>
+        <p:nvSpPr>
+          <p:cNvPr id="12" name="TextBox 11"/>
+          <p:cNvSpPr txBox="1"/>
+          <p:nvPr/>
+        </p:nvSpPr>
+        <p:spPr>
+          <a:xfrm>
+            <a:off x="8298484" y="2258568"/>
+            <a:ext cx="3143402" cy="3931920"/>
+          </a:xfrm>
+          <a:prstGeom prst="rect">
+            <a:avLst/>
+          </a:prstGeom>
+          <a:noFill/>
+        </p:spPr>
+        <p:txBody>
+          <a:bodyPr wrap="square">
+            <a:spAutoFit/>
+          </a:bodyPr>
+          <a:lstStyle/>
+          <a:p>
+            <a:pPr>
+              <a:lnSpc>
+                <a:spcPct val="120000"/>
+              </a:lnSpc>
+            </a:pPr>
+            <a:r>
+              <a:rPr sz="1150">
+                <a:solidFill>
+                  <a:srgbClr val="F5F3EC"/>
+                </a:solidFill>
+                <a:latin typeface="Arial"/>
+              </a:rPr>
+              <a:t>社群用戶反映極米與小米 L1 Pro 等機種出現畫面微小斑點，持續引發關於光學引擎進塵（Dust Blobs）與 DMD 晶片維護的討論（Reddit r/projectors）。</a:t>
+            </a:r>
+          </a:p>
+        </p:txBody>
+      </p:sp>
+      <p:sp>
+        <p:nvSpPr>
+          <p:cNvPr id="13" name="TextBox 12"/>
           <p:cNvSpPr txBox="1"/>
           <p:nvPr/>
         </p:nvSpPr>
@@ -4457,7 +4684,7 @@
                 </a:solidFill>
                 <a:latin typeface="Arial"/>
               </a:rPr>
-              <a:t>05 · SECTION</a:t>
+              <a:t>05 · SECTION　🔭</a:t>
             </a:r>
           </a:p>
         </p:txBody>
@@ -4492,30 +4719,34 @@
                 </a:solidFill>
                 <a:latin typeface="Arial"/>
               </a:rPr>
-              <a:t>技術與供應鏈</a:t>
-            </a:r>
-          </a:p>
-        </p:txBody>
-      </p:sp>
-      <p:sp>
-        <p:nvSpPr>
-          <p:cNvPr id="4" name="Oval 3"/>
+              <a:t>下週關注</a:t>
+            </a:r>
+          </a:p>
+        </p:txBody>
+      </p:sp>
+      <p:sp>
+        <p:nvSpPr>
+          <p:cNvPr id="4" name="Rounded Rectangle 3"/>
           <p:cNvSpPr/>
           <p:nvPr/>
         </p:nvSpPr>
         <p:spPr>
           <a:xfrm>
-            <a:off x="594360" y="1728216"/>
-            <a:ext cx="100584" cy="100584"/>
-          </a:xfrm>
-          <a:prstGeom prst="ellipse">
-            <a:avLst/>
+            <a:off x="548640" y="1600200"/>
+            <a:ext cx="5432907" cy="4754880"/>
+          </a:xfrm>
+          <a:prstGeom prst="roundRect">
+            <a:avLst>
+              <a:gd name="adj" fmla="val 6000"/>
+            </a:avLst>
           </a:prstGeom>
           <a:solidFill>
-            <a:srgbClr val="4C7EFF"/>
+            <a:srgbClr val="23262F"/>
           </a:solidFill>
-          <a:ln>
-            <a:noFill/>
+          <a:ln w="12700">
+            <a:solidFill>
+              <a:srgbClr val="4C7EFF"/>
+            </a:solidFill>
           </a:ln>
           <a:effectLst/>
         </p:spPr>
@@ -4549,8 +4780,8 @@
         </p:nvSpPr>
         <p:spPr>
           <a:xfrm>
-            <a:off x="868680" y="1600200"/>
-            <a:ext cx="10698480" cy="402336"/>
+            <a:off x="749808" y="1764792"/>
+            <a:ext cx="5030571" cy="457200"/>
           </a:xfrm>
           <a:prstGeom prst="rect">
             <a:avLst/>
@@ -4558,6 +4789,41 @@
           <a:noFill/>
         </p:spPr>
         <p:txBody>
+          <a:bodyPr wrap="square" anchor="t">
+            <a:spAutoFit/>
+          </a:bodyPr>
+          <a:lstStyle/>
+          <a:p>
+            <a:pPr algn="l"/>
+            <a:r>
+              <a:rPr sz="1450" b="1">
+                <a:solidFill>
+                  <a:srgbClr val="4C7EFF"/>
+                </a:solidFill>
+                <a:latin typeface="Arial"/>
+              </a:rPr>
+              <a:t>海信 PX4 Pro 上市時程與價格</a:t>
+            </a:r>
+          </a:p>
+        </p:txBody>
+      </p:sp>
+      <p:sp>
+        <p:nvSpPr>
+          <p:cNvPr id="6" name="TextBox 5"/>
+          <p:cNvSpPr txBox="1"/>
+          <p:nvPr/>
+        </p:nvSpPr>
+        <p:spPr>
+          <a:xfrm>
+            <a:off x="749808" y="2258568"/>
+            <a:ext cx="5030571" cy="3931920"/>
+          </a:xfrm>
+          <a:prstGeom prst="rect">
+            <a:avLst/>
+          </a:prstGeom>
+          <a:noFill/>
+        </p:spPr>
+        <p:txBody>
           <a:bodyPr wrap="square">
             <a:spAutoFit/>
           </a:bodyPr>
@@ -4565,40 +4831,44 @@
           <a:p>
             <a:pPr>
               <a:lnSpc>
-                <a:spcPct val="115000"/>
+                <a:spcPct val="120000"/>
               </a:lnSpc>
             </a:pPr>
             <a:r>
-              <a:rPr sz="1450" b="1">
-                <a:solidFill>
-                  <a:srgbClr val="FFB454"/>
+              <a:rPr sz="1150">
+                <a:solidFill>
+                  <a:srgbClr val="F5F3EC"/>
                 </a:solidFill>
                 <a:latin typeface="Arial"/>
               </a:rPr>
-              <a:t>AI 光互連與雷射晶片佈局</a:t>
-            </a:r>
-          </a:p>
-        </p:txBody>
-      </p:sp>
-      <p:sp>
-        <p:nvSpPr>
-          <p:cNvPr id="6" name="Oval 5"/>
+              <a:t>市場持續關注海信新款雷射電視 PX4 Pro 的實際上市時間與最終定價策略（Reddit r/projectors）。</a:t>
+            </a:r>
+          </a:p>
+        </p:txBody>
+      </p:sp>
+      <p:sp>
+        <p:nvSpPr>
+          <p:cNvPr id="7" name="Rounded Rectangle 6"/>
           <p:cNvSpPr/>
           <p:nvPr/>
         </p:nvSpPr>
         <p:spPr>
           <a:xfrm>
-            <a:off x="594360" y="2130552"/>
-            <a:ext cx="100584" cy="100584"/>
-          </a:xfrm>
-          <a:prstGeom prst="ellipse">
-            <a:avLst/>
+            <a:off x="6210147" y="1600200"/>
+            <a:ext cx="5432907" cy="4754880"/>
+          </a:xfrm>
+          <a:prstGeom prst="roundRect">
+            <a:avLst>
+              <a:gd name="adj" fmla="val 6000"/>
+            </a:avLst>
           </a:prstGeom>
           <a:solidFill>
-            <a:srgbClr val="4C7EFF"/>
+            <a:srgbClr val="23262F"/>
           </a:solidFill>
-          <a:ln>
-            <a:noFill/>
+          <a:ln w="12700">
+            <a:solidFill>
+              <a:srgbClr val="FFB454"/>
+            </a:solidFill>
           </a:ln>
           <a:effectLst/>
         </p:spPr>
@@ -4626,14 +4896,14 @@
       </p:sp>
       <p:sp>
         <p:nvSpPr>
-          <p:cNvPr id="7" name="TextBox 6"/>
+          <p:cNvPr id="8" name="TextBox 7"/>
           <p:cNvSpPr txBox="1"/>
           <p:nvPr/>
         </p:nvSpPr>
         <p:spPr>
           <a:xfrm>
-            <a:off x="868680" y="2002536"/>
-            <a:ext cx="10698480" cy="640080"/>
+            <a:off x="6411315" y="1764792"/>
+            <a:ext cx="5030571" cy="457200"/>
           </a:xfrm>
           <a:prstGeom prst="rect">
             <a:avLst/>
@@ -4641,16 +4911,12 @@
           <a:noFill/>
         </p:spPr>
         <p:txBody>
-          <a:bodyPr wrap="square">
+          <a:bodyPr wrap="square" anchor="t">
             <a:spAutoFit/>
           </a:bodyPr>
           <a:lstStyle/>
           <a:p>
-            <a:pPr>
-              <a:lnSpc>
-                <a:spcPct val="115000"/>
-              </a:lnSpc>
-            </a:pPr>
+            <a:pPr algn="l"/>
             <a:r>
               <a:rPr sz="1450" b="1">
                 <a:solidFill>
@@ -4658,61 +4924,8 @@
                 </a:solidFill>
                 <a:latin typeface="Arial"/>
               </a:rPr>
-              <a:t>唯捷光電</a:t>
-            </a:r>
-            <a:r>
-              <a:rPr sz="1450">
-                <a:solidFill>
-                  <a:srgbClr val="F5F3EC"/>
-                </a:solidFill>
-                <a:latin typeface="Arial"/>
-              </a:rPr>
-              <a:t> 投資約 7.41 億美元於常州建立研發製造基地，將業務由 VCSEL 拓展至高階磷化銦（InP）雷射晶片，主要應用於 AI 光互連通訊 (DigiTimes)。</a:t>
-            </a:r>
-          </a:p>
-        </p:txBody>
-      </p:sp>
-      <p:sp>
-        <p:nvSpPr>
-          <p:cNvPr id="8" name="Oval 7"/>
-          <p:cNvSpPr/>
-          <p:nvPr/>
-        </p:nvSpPr>
-        <p:spPr>
-          <a:xfrm>
-            <a:off x="594360" y="2770631"/>
-            <a:ext cx="100584" cy="100584"/>
-          </a:xfrm>
-          <a:prstGeom prst="ellipse">
-            <a:avLst/>
-          </a:prstGeom>
-          <a:solidFill>
-            <a:srgbClr val="4C7EFF"/>
-          </a:solidFill>
-          <a:ln>
-            <a:noFill/>
-          </a:ln>
-          <a:effectLst/>
-        </p:spPr>
-        <p:style>
-          <a:lnRef idx="1">
-            <a:schemeClr val="accent1"/>
-          </a:lnRef>
-          <a:fillRef idx="3">
-            <a:schemeClr val="accent1"/>
-          </a:fillRef>
-          <a:effectRef idx="2">
-            <a:schemeClr val="accent1"/>
-          </a:effectRef>
-          <a:fontRef idx="minor">
-            <a:schemeClr val="lt1"/>
-          </a:fontRef>
-        </p:style>
-        <p:txBody>
-          <a:bodyPr rtlCol="0" anchor="ctr"/>
-          <a:lstStyle/>
-          <a:p>
-            <a:pPr algn="ctr"/>
+              <a:t>工程與商用機清庫存效應</a:t>
+            </a:r>
           </a:p>
         </p:txBody>
       </p:sp>
@@ -4724,8 +4937,8 @@
         </p:nvSpPr>
         <p:spPr>
           <a:xfrm>
-            <a:off x="868680" y="2642615"/>
-            <a:ext cx="10698480" cy="640080"/>
+            <a:off x="6411315" y="2258568"/>
+            <a:ext cx="5030571" cy="3931920"/>
           </a:xfrm>
           <a:prstGeom prst="rect">
             <a:avLst/>
@@ -4740,392 +4953,24 @@
           <a:p>
             <a:pPr>
               <a:lnSpc>
-                <a:spcPct val="115000"/>
+                <a:spcPct val="120000"/>
               </a:lnSpc>
             </a:pPr>
             <a:r>
-              <a:rPr sz="1450" b="1">
-                <a:solidFill>
-                  <a:srgbClr val="FFB454"/>
+              <a:rPr sz="1150">
+                <a:solidFill>
+                  <a:srgbClr val="F5F3EC"/>
                 </a:solidFill>
                 <a:latin typeface="Arial"/>
               </a:rPr>
-              <a:t>Lightmatter</a:t>
-            </a:r>
-            <a:r>
-              <a:rPr sz="1450">
-                <a:solidFill>
-                  <a:srgbClr val="F5F3EC"/>
-                </a:solidFill>
-                <a:latin typeface="Arial"/>
-              </a:rPr>
-              <a:t> 針對 SerDes 傳輸速度逼近 448G 導致的傳統銅纜瓶頸，提出全光學互連架構藍圖，加速推進資料中心轉向光通訊 (DigiTimes)。</a:t>
-            </a:r>
-          </a:p>
-        </p:txBody>
-      </p:sp>
-      <p:sp>
-        <p:nvSpPr>
-          <p:cNvPr id="10" name="Oval 9"/>
-          <p:cNvSpPr/>
-          <p:nvPr/>
-        </p:nvSpPr>
-        <p:spPr>
-          <a:xfrm>
-            <a:off x="594360" y="3410712"/>
-            <a:ext cx="100584" cy="100584"/>
-          </a:xfrm>
-          <a:prstGeom prst="ellipse">
-            <a:avLst/>
-          </a:prstGeom>
-          <a:solidFill>
-            <a:srgbClr val="4C7EFF"/>
-          </a:solidFill>
-          <a:ln>
-            <a:noFill/>
-          </a:ln>
-          <a:effectLst/>
-        </p:spPr>
-        <p:style>
-          <a:lnRef idx="1">
-            <a:schemeClr val="accent1"/>
-          </a:lnRef>
-          <a:fillRef idx="3">
-            <a:schemeClr val="accent1"/>
-          </a:fillRef>
-          <a:effectRef idx="2">
-            <a:schemeClr val="accent1"/>
-          </a:effectRef>
-          <a:fontRef idx="minor">
-            <a:schemeClr val="lt1"/>
-          </a:fontRef>
-        </p:style>
-        <p:txBody>
-          <a:bodyPr rtlCol="0" anchor="ctr"/>
-          <a:lstStyle/>
-          <a:p>
-            <a:pPr algn="ctr"/>
-          </a:p>
-        </p:txBody>
-      </p:sp>
-      <p:sp>
-        <p:nvSpPr>
-          <p:cNvPr id="11" name="TextBox 10"/>
-          <p:cNvSpPr txBox="1"/>
-          <p:nvPr/>
-        </p:nvSpPr>
-        <p:spPr>
-          <a:xfrm>
-            <a:off x="868680" y="3282696"/>
-            <a:ext cx="10698480" cy="402336"/>
-          </a:xfrm>
-          <a:prstGeom prst="rect">
-            <a:avLst/>
-          </a:prstGeom>
-          <a:noFill/>
-        </p:spPr>
-        <p:txBody>
-          <a:bodyPr wrap="square">
-            <a:spAutoFit/>
-          </a:bodyPr>
-          <a:lstStyle/>
-          <a:p>
-            <a:pPr>
-              <a:lnSpc>
-                <a:spcPct val="115000"/>
-              </a:lnSpc>
-            </a:pPr>
-            <a:r>
-              <a:rPr sz="1450" b="1">
-                <a:solidFill>
-                  <a:srgbClr val="FFB454"/>
-                </a:solidFill>
-                <a:latin typeface="Arial"/>
-              </a:rPr>
-              <a:t>顯示技術與消費體驗討論</a:t>
-            </a:r>
-          </a:p>
-        </p:txBody>
-      </p:sp>
-      <p:sp>
-        <p:nvSpPr>
-          <p:cNvPr id="12" name="Oval 11"/>
-          <p:cNvSpPr/>
-          <p:nvPr/>
-        </p:nvSpPr>
-        <p:spPr>
-          <a:xfrm>
-            <a:off x="594360" y="3813048"/>
-            <a:ext cx="100584" cy="100584"/>
-          </a:xfrm>
-          <a:prstGeom prst="ellipse">
-            <a:avLst/>
-          </a:prstGeom>
-          <a:solidFill>
-            <a:srgbClr val="4C7EFF"/>
-          </a:solidFill>
-          <a:ln>
-            <a:noFill/>
-          </a:ln>
-          <a:effectLst/>
-        </p:spPr>
-        <p:style>
-          <a:lnRef idx="1">
-            <a:schemeClr val="accent1"/>
-          </a:lnRef>
-          <a:fillRef idx="3">
-            <a:schemeClr val="accent1"/>
-          </a:fillRef>
-          <a:effectRef idx="2">
-            <a:schemeClr val="accent1"/>
-          </a:effectRef>
-          <a:fontRef idx="minor">
-            <a:schemeClr val="lt1"/>
-          </a:fontRef>
-        </p:style>
-        <p:txBody>
-          <a:bodyPr rtlCol="0" anchor="ctr"/>
-          <a:lstStyle/>
-          <a:p>
-            <a:pPr algn="ctr"/>
-          </a:p>
-        </p:txBody>
-      </p:sp>
-      <p:sp>
-        <p:nvSpPr>
-          <p:cNvPr id="13" name="TextBox 12"/>
-          <p:cNvSpPr txBox="1"/>
-          <p:nvPr/>
-        </p:nvSpPr>
-        <p:spPr>
-          <a:xfrm>
-            <a:off x="868680" y="3685032"/>
-            <a:ext cx="10698480" cy="877824"/>
-          </a:xfrm>
-          <a:prstGeom prst="rect">
-            <a:avLst/>
-          </a:prstGeom>
-          <a:noFill/>
-        </p:spPr>
-        <p:txBody>
-          <a:bodyPr wrap="square">
-            <a:spAutoFit/>
-          </a:bodyPr>
-          <a:lstStyle/>
-          <a:p>
-            <a:pPr>
-              <a:lnSpc>
-                <a:spcPct val="115000"/>
-              </a:lnSpc>
-            </a:pPr>
-            <a:r>
-              <a:rPr sz="1450" b="1">
-                <a:solidFill>
-                  <a:srgbClr val="FFB454"/>
-                </a:solidFill>
-                <a:latin typeface="Arial"/>
-              </a:rPr>
-              <a:t>彩虹效應與技術選擇</a:t>
-            </a:r>
-            <a:r>
-              <a:rPr sz="1450">
-                <a:solidFill>
-                  <a:srgbClr val="F5F3EC"/>
-                </a:solidFill>
-                <a:latin typeface="Arial"/>
-              </a:rPr>
-              <a:t>：部分消費者因無法適應 DLP 投影機的彩虹效應（RBE）而選擇退貨，並轉向尋求畫質相近但無彩虹效應的 LCD 技術或其他替代方案 (Reddit r/projectors)。</a:t>
-            </a:r>
-          </a:p>
-        </p:txBody>
-      </p:sp>
-      <p:sp>
-        <p:nvSpPr>
-          <p:cNvPr id="14" name="Oval 13"/>
-          <p:cNvSpPr/>
-          <p:nvPr/>
-        </p:nvSpPr>
-        <p:spPr>
-          <a:xfrm>
-            <a:off x="594360" y="4690872"/>
-            <a:ext cx="100584" cy="100584"/>
-          </a:xfrm>
-          <a:prstGeom prst="ellipse">
-            <a:avLst/>
-          </a:prstGeom>
-          <a:solidFill>
-            <a:srgbClr val="4C7EFF"/>
-          </a:solidFill>
-          <a:ln>
-            <a:noFill/>
-          </a:ln>
-          <a:effectLst/>
-        </p:spPr>
-        <p:style>
-          <a:lnRef idx="1">
-            <a:schemeClr val="accent1"/>
-          </a:lnRef>
-          <a:fillRef idx="3">
-            <a:schemeClr val="accent1"/>
-          </a:fillRef>
-          <a:effectRef idx="2">
-            <a:schemeClr val="accent1"/>
-          </a:effectRef>
-          <a:fontRef idx="minor">
-            <a:schemeClr val="lt1"/>
-          </a:fontRef>
-        </p:style>
-        <p:txBody>
-          <a:bodyPr rtlCol="0" anchor="ctr"/>
-          <a:lstStyle/>
-          <a:p>
-            <a:pPr algn="ctr"/>
-          </a:p>
-        </p:txBody>
-      </p:sp>
-      <p:sp>
-        <p:nvSpPr>
-          <p:cNvPr id="15" name="TextBox 14"/>
-          <p:cNvSpPr txBox="1"/>
-          <p:nvPr/>
-        </p:nvSpPr>
-        <p:spPr>
-          <a:xfrm>
-            <a:off x="868680" y="4562856"/>
-            <a:ext cx="10698480" cy="877824"/>
-          </a:xfrm>
-          <a:prstGeom prst="rect">
-            <a:avLst/>
-          </a:prstGeom>
-          <a:noFill/>
-        </p:spPr>
-        <p:txBody>
-          <a:bodyPr wrap="square">
-            <a:spAutoFit/>
-          </a:bodyPr>
-          <a:lstStyle/>
-          <a:p>
-            <a:pPr>
-              <a:lnSpc>
-                <a:spcPct val="115000"/>
-              </a:lnSpc>
-            </a:pPr>
-            <a:r>
-              <a:rPr sz="1450" b="1">
-                <a:solidFill>
-                  <a:srgbClr val="FFB454"/>
-                </a:solidFill>
-                <a:latin typeface="Arial"/>
-              </a:rPr>
-              <a:t>光學防塵與維護痛點</a:t>
-            </a:r>
-            <a:r>
-              <a:rPr sz="1450">
-                <a:solidFill>
-                  <a:srgbClr val="F5F3EC"/>
-                </a:solidFill>
-                <a:latin typeface="Arial"/>
-              </a:rPr>
-              <a:t>：極米（XGIMI）與小米 L1 Pro 等機種在社群上引發關於畫面微小黑點/斑點的討論，反映出光學引擎進塵（Dust Blobs）與 DMD 晶片維護仍是消費級產品常見的硬體痛點 (Reddit r/projectors)。</a:t>
-            </a:r>
-          </a:p>
-        </p:txBody>
-      </p:sp>
-      <p:sp>
-        <p:nvSpPr>
-          <p:cNvPr id="16" name="Oval 15"/>
-          <p:cNvSpPr/>
-          <p:nvPr/>
-        </p:nvSpPr>
-        <p:spPr>
-          <a:xfrm>
-            <a:off x="594360" y="5568696"/>
-            <a:ext cx="100584" cy="100584"/>
-          </a:xfrm>
-          <a:prstGeom prst="ellipse">
-            <a:avLst/>
-          </a:prstGeom>
-          <a:solidFill>
-            <a:srgbClr val="4C7EFF"/>
-          </a:solidFill>
-          <a:ln>
-            <a:noFill/>
-          </a:ln>
-          <a:effectLst/>
-        </p:spPr>
-        <p:style>
-          <a:lnRef idx="1">
-            <a:schemeClr val="accent1"/>
-          </a:lnRef>
-          <a:fillRef idx="3">
-            <a:schemeClr val="accent1"/>
-          </a:fillRef>
-          <a:effectRef idx="2">
-            <a:schemeClr val="accent1"/>
-          </a:effectRef>
-          <a:fontRef idx="minor">
-            <a:schemeClr val="lt1"/>
-          </a:fontRef>
-        </p:style>
-        <p:txBody>
-          <a:bodyPr rtlCol="0" anchor="ctr"/>
-          <a:lstStyle/>
-          <a:p>
-            <a:pPr algn="ctr"/>
-          </a:p>
-        </p:txBody>
-      </p:sp>
-      <p:sp>
-        <p:nvSpPr>
-          <p:cNvPr id="17" name="TextBox 16"/>
-          <p:cNvSpPr txBox="1"/>
-          <p:nvPr/>
-        </p:nvSpPr>
-        <p:spPr>
-          <a:xfrm>
-            <a:off x="868680" y="5440680"/>
-            <a:ext cx="10698480" cy="640080"/>
-          </a:xfrm>
-          <a:prstGeom prst="rect">
-            <a:avLst/>
-          </a:prstGeom>
-          <a:noFill/>
-        </p:spPr>
-        <p:txBody>
-          <a:bodyPr wrap="square">
-            <a:spAutoFit/>
-          </a:bodyPr>
-          <a:lstStyle/>
-          <a:p>
-            <a:pPr>
-              <a:lnSpc>
-                <a:spcPct val="115000"/>
-              </a:lnSpc>
-            </a:pPr>
-            <a:r>
-              <a:rPr sz="1450" b="1">
-                <a:solidFill>
-                  <a:srgbClr val="FFB454"/>
-                </a:solidFill>
-                <a:latin typeface="Arial"/>
-              </a:rPr>
-              <a:t>使用情境轉變</a:t>
-            </a:r>
-            <a:r>
-              <a:rPr sz="1450">
-                <a:solidFill>
-                  <a:srgbClr val="F5F3EC"/>
-                </a:solidFill>
-                <a:latin typeface="Arial"/>
-              </a:rPr>
-              <a:t>：隨著快速校正與可攜性提升，投影機正從過往繁瑣的「正式觀影設備」逐漸轉型為融入日常生活的「隨性娛樂工具」(Reddit r/projectors)。</a:t>
-            </a:r>
-          </a:p>
-        </p:txBody>
-      </p:sp>
-      <p:sp>
-        <p:nvSpPr>
-          <p:cNvPr id="18" name="TextBox 17"/>
+              <a:t>日立雙燈工程機（TCP-D1070U）清庫存與各品牌工程機款促銷後續的市場接受度（ZOL投影機頻道）。</a:t>
+            </a:r>
+          </a:p>
+        </p:txBody>
+      </p:sp>
+      <p:sp>
+        <p:nvSpPr>
+          <p:cNvPr id="10" name="TextBox 9"/>
           <p:cNvSpPr txBox="1"/>
           <p:nvPr/>
         </p:nvSpPr>
@@ -5186,90 +5031,22 @@
       <p:grpSpPr/>
       <p:sp>
         <p:nvSpPr>
-          <p:cNvPr id="2" name="TextBox 1"/>
-          <p:cNvSpPr txBox="1"/>
-          <p:nvPr/>
-        </p:nvSpPr>
-        <p:spPr>
-          <a:xfrm>
-            <a:off x="548640" y="384048"/>
-            <a:ext cx="7315200" cy="320040"/>
-          </a:xfrm>
-          <a:prstGeom prst="rect">
-            <a:avLst/>
-          </a:prstGeom>
-          <a:noFill/>
-        </p:spPr>
-        <p:txBody>
-          <a:bodyPr wrap="square" anchor="t">
-            <a:spAutoFit/>
-          </a:bodyPr>
-          <a:lstStyle/>
-          <a:p>
-            <a:pPr algn="l"/>
-            <a:r>
-              <a:rPr sz="1100" b="1">
-                <a:solidFill>
-                  <a:srgbClr val="FFB454"/>
-                </a:solidFill>
-                <a:latin typeface="Arial"/>
-              </a:rPr>
-              <a:t>06 · SECTION</a:t>
-            </a:r>
-          </a:p>
-        </p:txBody>
-      </p:sp>
-      <p:sp>
-        <p:nvSpPr>
-          <p:cNvPr id="3" name="TextBox 2"/>
-          <p:cNvSpPr txBox="1"/>
-          <p:nvPr/>
-        </p:nvSpPr>
-        <p:spPr>
-          <a:xfrm>
-            <a:off x="548640" y="713232"/>
-            <a:ext cx="10972800" cy="685800"/>
-          </a:xfrm>
-          <a:prstGeom prst="rect">
-            <a:avLst/>
-          </a:prstGeom>
-          <a:noFill/>
-        </p:spPr>
-        <p:txBody>
-          <a:bodyPr wrap="square" anchor="t">
-            <a:spAutoFit/>
-          </a:bodyPr>
-          <a:lstStyle/>
-          <a:p>
-            <a:pPr algn="l"/>
-            <a:r>
-              <a:rPr sz="2600" b="1">
-                <a:solidFill>
-                  <a:srgbClr val="F5F3EC"/>
-                </a:solidFill>
-                <a:latin typeface="Arial"/>
-              </a:rPr>
-              <a:t>下週關注</a:t>
-            </a:r>
-          </a:p>
-        </p:txBody>
-      </p:sp>
-      <p:sp>
-        <p:nvSpPr>
-          <p:cNvPr id="4" name="Oval 3"/>
+          <p:cNvPr id="2" name="Oval 1"/>
           <p:cNvSpPr/>
           <p:nvPr/>
         </p:nvSpPr>
         <p:spPr>
           <a:xfrm>
-            <a:off x="594360" y="1728216"/>
-            <a:ext cx="100584" cy="100584"/>
+            <a:off x="8961120" y="3200400"/>
+            <a:ext cx="5486400" cy="5486400"/>
           </a:xfrm>
           <a:prstGeom prst="ellipse">
             <a:avLst/>
           </a:prstGeom>
           <a:solidFill>
-            <a:srgbClr val="4C7EFF"/>
+            <a:srgbClr val="4C7EFF">
+              <a:alpha val="10000"/>
+            </a:srgbClr>
           </a:solidFill>
           <a:ln>
             <a:noFill/>
@@ -5300,14 +5077,14 @@
       </p:sp>
       <p:sp>
         <p:nvSpPr>
-          <p:cNvPr id="5" name="TextBox 4"/>
+          <p:cNvPr id="3" name="TextBox 2"/>
           <p:cNvSpPr txBox="1"/>
           <p:nvPr/>
         </p:nvSpPr>
         <p:spPr>
           <a:xfrm>
-            <a:off x="868680" y="1600200"/>
-            <a:ext cx="10698480" cy="640080"/>
+            <a:off x="731520" y="2926080"/>
+            <a:ext cx="9144000" cy="822960"/>
           </a:xfrm>
           <a:prstGeom prst="rect">
             <a:avLst/>
@@ -5315,82 +5092,34 @@
           <a:noFill/>
         </p:spPr>
         <p:txBody>
-          <a:bodyPr wrap="square">
+          <a:bodyPr wrap="square" anchor="t">
             <a:spAutoFit/>
           </a:bodyPr>
           <a:lstStyle/>
           <a:p>
-            <a:pPr>
-              <a:lnSpc>
-                <a:spcPct val="115000"/>
-              </a:lnSpc>
-            </a:pPr>
-            <a:r>
-              <a:rPr sz="1450">
+            <a:pPr algn="l"/>
+            <a:r>
+              <a:rPr sz="3000" b="1">
                 <a:solidFill>
                   <a:srgbClr val="F5F3EC"/>
                 </a:solidFill>
                 <a:latin typeface="Arial"/>
               </a:rPr>
-              <a:t>1. 觀察當貝 RX10（便攜雲台）與明基 LH660（高亮商務）上市後的市場接受度與消費者實機測評 (IT之家)。</a:t>
-            </a:r>
-          </a:p>
-        </p:txBody>
-      </p:sp>
-      <p:sp>
-        <p:nvSpPr>
-          <p:cNvPr id="6" name="Oval 5"/>
-          <p:cNvSpPr/>
-          <p:nvPr/>
-        </p:nvSpPr>
-        <p:spPr>
-          <a:xfrm>
-            <a:off x="594360" y="2368296"/>
-            <a:ext cx="100584" cy="100584"/>
-          </a:xfrm>
-          <a:prstGeom prst="ellipse">
-            <a:avLst/>
-          </a:prstGeom>
-          <a:solidFill>
-            <a:srgbClr val="4C7EFF"/>
-          </a:solidFill>
-          <a:ln>
-            <a:noFill/>
-          </a:ln>
-          <a:effectLst/>
-        </p:spPr>
-        <p:style>
-          <a:lnRef idx="1">
-            <a:schemeClr val="accent1"/>
-          </a:lnRef>
-          <a:fillRef idx="3">
-            <a:schemeClr val="accent1"/>
-          </a:fillRef>
-          <a:effectRef idx="2">
-            <a:schemeClr val="accent1"/>
-          </a:effectRef>
-          <a:fontRef idx="minor">
-            <a:schemeClr val="lt1"/>
-          </a:fontRef>
-        </p:style>
-        <p:txBody>
-          <a:bodyPr rtlCol="0" anchor="ctr"/>
-          <a:lstStyle/>
-          <a:p>
-            <a:pPr algn="ctr"/>
-          </a:p>
-        </p:txBody>
-      </p:sp>
-      <p:sp>
-        <p:nvSpPr>
-          <p:cNvPr id="7" name="TextBox 6"/>
+              <a:t>投影機情報站</a:t>
+            </a:r>
+          </a:p>
+        </p:txBody>
+      </p:sp>
+      <p:sp>
+        <p:nvSpPr>
+          <p:cNvPr id="4" name="TextBox 3"/>
           <p:cNvSpPr txBox="1"/>
           <p:nvPr/>
         </p:nvSpPr>
         <p:spPr>
           <a:xfrm>
-            <a:off x="868680" y="2240280"/>
-            <a:ext cx="10698480" cy="640080"/>
+            <a:off x="731520" y="3611880"/>
+            <a:ext cx="9144000" cy="457200"/>
           </a:xfrm>
           <a:prstGeom prst="rect">
             <a:avLst/>
@@ -5398,82 +5127,34 @@
           <a:noFill/>
         </p:spPr>
         <p:txBody>
-          <a:bodyPr wrap="square">
+          <a:bodyPr wrap="square" anchor="t">
             <a:spAutoFit/>
           </a:bodyPr>
           <a:lstStyle/>
           <a:p>
-            <a:pPr>
-              <a:lnSpc>
-                <a:spcPct val="115000"/>
-              </a:lnSpc>
-            </a:pPr>
-            <a:r>
-              <a:rPr sz="1450">
-                <a:solidFill>
-                  <a:srgbClr val="F5F3EC"/>
+            <a:pPr algn="l"/>
+            <a:r>
+              <a:rPr sz="1400" b="0">
+                <a:solidFill>
+                  <a:srgbClr val="9096A1"/>
                 </a:solidFill>
                 <a:latin typeface="Arial"/>
               </a:rPr>
-              <a:t>2. 關注 AI 算力需求帶動下，唯捷光電等光學元件廠在高階雷射晶片供應鏈的後續發展 (DigiTimes)。</a:t>
-            </a:r>
-          </a:p>
-        </p:txBody>
-      </p:sp>
-      <p:sp>
-        <p:nvSpPr>
-          <p:cNvPr id="8" name="Oval 7"/>
-          <p:cNvSpPr/>
-          <p:nvPr/>
-        </p:nvSpPr>
-        <p:spPr>
-          <a:xfrm>
-            <a:off x="594360" y="3008376"/>
-            <a:ext cx="100584" cy="100584"/>
-          </a:xfrm>
-          <a:prstGeom prst="ellipse">
-            <a:avLst/>
-          </a:prstGeom>
-          <a:solidFill>
-            <a:srgbClr val="4C7EFF"/>
-          </a:solidFill>
-          <a:ln>
-            <a:noFill/>
-          </a:ln>
-          <a:effectLst/>
-        </p:spPr>
-        <p:style>
-          <a:lnRef idx="1">
-            <a:schemeClr val="accent1"/>
-          </a:lnRef>
-          <a:fillRef idx="3">
-            <a:schemeClr val="accent1"/>
-          </a:fillRef>
-          <a:effectRef idx="2">
-            <a:schemeClr val="accent1"/>
-          </a:effectRef>
-          <a:fontRef idx="minor">
-            <a:schemeClr val="lt1"/>
-          </a:fontRef>
-        </p:style>
-        <p:txBody>
-          <a:bodyPr rtlCol="0" anchor="ctr"/>
-          <a:lstStyle/>
-          <a:p>
-            <a:pPr algn="ctr"/>
-          </a:p>
-        </p:txBody>
-      </p:sp>
-      <p:sp>
-        <p:nvSpPr>
-          <p:cNvPr id="9" name="TextBox 8"/>
+              <a:t>由本站爬蟲每日追蹤產業動態，AI 自動摘要與分類</a:t>
+            </a:r>
+          </a:p>
+        </p:txBody>
+      </p:sp>
+      <p:sp>
+        <p:nvSpPr>
+          <p:cNvPr id="5" name="TextBox 4"/>
           <p:cNvSpPr txBox="1"/>
           <p:nvPr/>
         </p:nvSpPr>
         <p:spPr>
           <a:xfrm>
-            <a:off x="868680" y="2880360"/>
-            <a:ext cx="10698480" cy="640080"/>
+            <a:off x="11430000" y="6446520"/>
+            <a:ext cx="548640" cy="274320"/>
           </a:xfrm>
           <a:prstGeom prst="rect">
             <a:avLst/>
@@ -5481,45 +5162,6 @@
           <a:noFill/>
         </p:spPr>
         <p:txBody>
-          <a:bodyPr wrap="square">
-            <a:spAutoFit/>
-          </a:bodyPr>
-          <a:lstStyle/>
-          <a:p>
-            <a:pPr>
-              <a:lnSpc>
-                <a:spcPct val="115000"/>
-              </a:lnSpc>
-            </a:pPr>
-            <a:r>
-              <a:rPr sz="1450">
-                <a:solidFill>
-                  <a:srgbClr val="F5F3EC"/>
-                </a:solidFill>
-                <a:latin typeface="Arial"/>
-              </a:rPr>
-              <a:t>3. 留意消費級投影機品牌是否針對進塵防護與 DLP 彩虹效應提出更完善的技術解決方案 (Reddit r/projectors)。</a:t>
-            </a:r>
-          </a:p>
-        </p:txBody>
-      </p:sp>
-      <p:sp>
-        <p:nvSpPr>
-          <p:cNvPr id="10" name="TextBox 9"/>
-          <p:cNvSpPr txBox="1"/>
-          <p:nvPr/>
-        </p:nvSpPr>
-        <p:spPr>
-          <a:xfrm>
-            <a:off x="11430000" y="6446520"/>
-            <a:ext cx="548640" cy="274320"/>
-          </a:xfrm>
-          <a:prstGeom prst="rect">
-            <a:avLst/>
-          </a:prstGeom>
-          <a:noFill/>
-        </p:spPr>
-        <p:txBody>
           <a:bodyPr wrap="square" anchor="t">
             <a:spAutoFit/>
           </a:bodyPr>
@@ -5534,183 +5176,6 @@
                 <a:latin typeface="Arial"/>
               </a:rPr>
               <a:t>06</a:t>
-            </a:r>
-          </a:p>
-        </p:txBody>
-      </p:sp>
-    </p:spTree>
-  </p:cSld>
-  <p:clrMapOvr>
-    <a:masterClrMapping/>
-  </p:clrMapOvr>
-</p:sld>
-</file>
-
-<file path=ppt/slides/slide7.xml><?xml version="1.0" encoding="utf-8"?>
-<p:sld xmlns:a="http://schemas.openxmlformats.org/drawingml/2006/main" xmlns:p="http://schemas.openxmlformats.org/presentationml/2006/main" xmlns:r="http://schemas.openxmlformats.org/officeDocument/2006/relationships">
-  <p:cSld>
-    <p:bg>
-      <p:bgPr>
-        <a:solidFill>
-          <a:srgbClr val="14161A"/>
-        </a:solidFill>
-        <a:effectLst/>
-      </p:bgPr>
-    </p:bg>
-    <p:spTree>
-      <p:nvGrpSpPr>
-        <p:cNvPr id="1" name=""/>
-        <p:cNvGrpSpPr/>
-        <p:nvPr/>
-      </p:nvGrpSpPr>
-      <p:grpSpPr/>
-      <p:sp>
-        <p:nvSpPr>
-          <p:cNvPr id="2" name="Oval 1"/>
-          <p:cNvSpPr/>
-          <p:nvPr/>
-        </p:nvSpPr>
-        <p:spPr>
-          <a:xfrm>
-            <a:off x="8961120" y="3200400"/>
-            <a:ext cx="5486400" cy="5486400"/>
-          </a:xfrm>
-          <a:prstGeom prst="ellipse">
-            <a:avLst/>
-          </a:prstGeom>
-          <a:solidFill>
-            <a:srgbClr val="4C7EFF">
-              <a:alpha val="10000"/>
-            </a:srgbClr>
-          </a:solidFill>
-          <a:ln>
-            <a:noFill/>
-          </a:ln>
-          <a:effectLst/>
-        </p:spPr>
-        <p:style>
-          <a:lnRef idx="1">
-            <a:schemeClr val="accent1"/>
-          </a:lnRef>
-          <a:fillRef idx="3">
-            <a:schemeClr val="accent1"/>
-          </a:fillRef>
-          <a:effectRef idx="2">
-            <a:schemeClr val="accent1"/>
-          </a:effectRef>
-          <a:fontRef idx="minor">
-            <a:schemeClr val="lt1"/>
-          </a:fontRef>
-        </p:style>
-        <p:txBody>
-          <a:bodyPr rtlCol="0" anchor="ctr"/>
-          <a:lstStyle/>
-          <a:p>
-            <a:pPr algn="ctr"/>
-          </a:p>
-        </p:txBody>
-      </p:sp>
-      <p:sp>
-        <p:nvSpPr>
-          <p:cNvPr id="3" name="TextBox 2"/>
-          <p:cNvSpPr txBox="1"/>
-          <p:nvPr/>
-        </p:nvSpPr>
-        <p:spPr>
-          <a:xfrm>
-            <a:off x="731520" y="2926080"/>
-            <a:ext cx="9144000" cy="822960"/>
-          </a:xfrm>
-          <a:prstGeom prst="rect">
-            <a:avLst/>
-          </a:prstGeom>
-          <a:noFill/>
-        </p:spPr>
-        <p:txBody>
-          <a:bodyPr wrap="square" anchor="t">
-            <a:spAutoFit/>
-          </a:bodyPr>
-          <a:lstStyle/>
-          <a:p>
-            <a:pPr algn="l"/>
-            <a:r>
-              <a:rPr sz="3000" b="1">
-                <a:solidFill>
-                  <a:srgbClr val="F5F3EC"/>
-                </a:solidFill>
-                <a:latin typeface="Arial"/>
-              </a:rPr>
-              <a:t>投影機情報站</a:t>
-            </a:r>
-          </a:p>
-        </p:txBody>
-      </p:sp>
-      <p:sp>
-        <p:nvSpPr>
-          <p:cNvPr id="4" name="TextBox 3"/>
-          <p:cNvSpPr txBox="1"/>
-          <p:nvPr/>
-        </p:nvSpPr>
-        <p:spPr>
-          <a:xfrm>
-            <a:off x="731520" y="3611880"/>
-            <a:ext cx="9144000" cy="457200"/>
-          </a:xfrm>
-          <a:prstGeom prst="rect">
-            <a:avLst/>
-          </a:prstGeom>
-          <a:noFill/>
-        </p:spPr>
-        <p:txBody>
-          <a:bodyPr wrap="square" anchor="t">
-            <a:spAutoFit/>
-          </a:bodyPr>
-          <a:lstStyle/>
-          <a:p>
-            <a:pPr algn="l"/>
-            <a:r>
-              <a:rPr sz="1400" b="0">
-                <a:solidFill>
-                  <a:srgbClr val="9096A1"/>
-                </a:solidFill>
-                <a:latin typeface="Arial"/>
-              </a:rPr>
-              <a:t>由本站爬蟲每日追蹤產業動態，AI 自動摘要與分類</a:t>
-            </a:r>
-          </a:p>
-        </p:txBody>
-      </p:sp>
-      <p:sp>
-        <p:nvSpPr>
-          <p:cNvPr id="5" name="TextBox 4"/>
-          <p:cNvSpPr txBox="1"/>
-          <p:nvPr/>
-        </p:nvSpPr>
-        <p:spPr>
-          <a:xfrm>
-            <a:off x="11430000" y="6446520"/>
-            <a:ext cx="548640" cy="274320"/>
-          </a:xfrm>
-          <a:prstGeom prst="rect">
-            <a:avLst/>
-          </a:prstGeom>
-          <a:noFill/>
-        </p:spPr>
-        <p:txBody>
-          <a:bodyPr wrap="square" anchor="t">
-            <a:spAutoFit/>
-          </a:bodyPr>
-          <a:lstStyle/>
-          <a:p>
-            <a:pPr algn="r"/>
-            <a:r>
-              <a:rPr sz="1000" b="0">
-                <a:solidFill>
-                  <a:srgbClr val="9096A1"/>
-                </a:solidFill>
-                <a:latin typeface="Arial"/>
-              </a:rPr>
-              <a:t>07</a:t>
             </a:r>
           </a:p>
         </p:txBody>
